--- a/outputs/longcycler_only_methods_summary/Longcycler_only_methods_summary.pptx
+++ b/outputs/longcycler_only_methods_summary/Longcycler_only_methods_summary.pptx
@@ -2,15 +2,15 @@
 <file path=ppt/presentation.xml><?xml version="1.0" encoding="utf-8"?>
 <p:presentation xmlns:p="http://schemas.openxmlformats.org/presentationml/2006/main">
   <p:sldMasterIdLst>
-    <p:sldMasterId xmlns:r="http://schemas.openxmlformats.org/officeDocument/2006/relationships" id="2147483648" r:id="Ra252cd6f30fb4f1b"/>
+    <p:sldMasterId xmlns:r="http://schemas.openxmlformats.org/officeDocument/2006/relationships" id="2147483648" r:id="R90229518c1ea4ef3"/>
   </p:sldMasterIdLst>
   <p:notesMasterIdLst>
-    <p:notesMasterId xmlns:r="http://schemas.openxmlformats.org/officeDocument/2006/relationships" r:id="Ra63f0cfbb3c94484"/>
+    <p:notesMasterId xmlns:r="http://schemas.openxmlformats.org/officeDocument/2006/relationships" r:id="R5e6fba77dab54cc9"/>
   </p:notesMasterIdLst>
   <p:sldIdLst>
-    <p:sldId xmlns:r="http://schemas.openxmlformats.org/officeDocument/2006/relationships" id="256" r:id="R9985c8fdf88d4698"/>
-    <p:sldId xmlns:r="http://schemas.openxmlformats.org/officeDocument/2006/relationships" id="257" r:id="R8d784c953044492c"/>
-    <p:sldId xmlns:r="http://schemas.openxmlformats.org/officeDocument/2006/relationships" id="258" r:id="Rf9058cecb4cb400e"/>
+    <p:sldId xmlns:r="http://schemas.openxmlformats.org/officeDocument/2006/relationships" id="256" r:id="Rdf095d7f1f3b4bfb"/>
+    <p:sldId xmlns:r="http://schemas.openxmlformats.org/officeDocument/2006/relationships" id="257" r:id="Rc43e06b065cd44cb"/>
+    <p:sldId xmlns:r="http://schemas.openxmlformats.org/officeDocument/2006/relationships" id="258" r:id="R8c456c51b2e246b9"/>
   </p:sldIdLst>
   <p:sldSz cx="12192000" cy="6858000"/>
   <p:notesSz cx="6858000" cy="9144000"/>
@@ -491,7 +491,11 @@
         <p:txBody>
           <a:bodyPr xmlns:a="http://schemas.openxmlformats.org/drawingml/2006/main"/>
           <a:lstStyle xmlns:a="http://schemas.openxmlformats.org/drawingml/2006/main"/>
-          <a:p xmlns:a="http://schemas.openxmlformats.org/drawingml/2006/main"/>
+          <a:p xmlns:a="http://schemas.openxmlformats.org/drawingml/2006/main">
+            <a:r>
+              <a:t>Opening: the analytical contract is one selected QC-passing Longcycler assembly per episode. Every result now starts from 532 episodes across 161 residents. The clinical phenotype remains operational and is assigned independently.</a:t>
+            </a:r>
+          </a:p>
         </p:txBody>
       </p:sp>
       <p:sp>
@@ -557,7 +561,11 @@
         <p:txBody>
           <a:bodyPr xmlns:a="http://schemas.openxmlformats.org/drawingml/2006/main"/>
           <a:lstStyle xmlns:a="http://schemas.openxmlformats.org/drawingml/2006/main"/>
-          <a:p xmlns:a="http://schemas.openxmlformats.org/drawingml/2006/main"/>
+          <a:p xmlns:a="http://schemas.openxmlformats.org/drawingml/2006/main">
+            <a:r>
+              <a:t>Name the unit before the number. Episodes, residents, direct pairs, adjacent transitions, VF features and MLST labels are different denominators. The focused result is 9 Not_UTI-to-UTI transitions, of which 5 are at or below 25 SNPs.</a:t>
+            </a:r>
+          </a:p>
         </p:txBody>
       </p:sp>
       <p:sp>
@@ -623,7 +631,11 @@
         <p:txBody>
           <a:bodyPr xmlns:a="http://schemas.openxmlformats.org/drawingml/2006/main"/>
           <a:lstStyle xmlns:a="http://schemas.openxmlformats.org/drawingml/2006/main"/>
-          <a:p xmlns:a="http://schemas.openxmlformats.org/drawingml/2006/main"/>
+          <a:p xmlns:a="http://schemas.openxmlformats.org/drawingml/2006/main">
+            <a:r>
+              <a:t>Safe interpretation: direct pair evidence supports cautious continuity descriptions. It does not establish uninterrupted carriage or causation. The casebook is complete at 9/9 linked rows, while 17 near-miss rows remain a separate audit population.</a:t>
+            </a:r>
+          </a:p>
         </p:txBody>
       </p:sp>
       <p:sp>
@@ -689,7 +701,7 @@
   </p:cSld>
   <p:clrMap bg1="lt1" tx1="dk1" bg2="lt2" tx2="dk2" accent1="accent1" accent2="accent2" accent3="accent3" accent4="accent4" accent5="accent5" accent6="accent6" hlink="hlink" folHlink="folHlink"/>
   <p:sldLayoutIdLst>
-    <p:sldLayoutId xmlns:r="http://schemas.openxmlformats.org/officeDocument/2006/relationships" id="2147483649" r:id="R501601d0c9754a63"/>
+    <p:sldLayoutId xmlns:r="http://schemas.openxmlformats.org/officeDocument/2006/relationships" id="2147483649" r:id="Rbea1a9cff0074d84"/>
   </p:sldLayoutIdLst>
   <p:txStyles>
     <p:titleStyle>
@@ -1377,7 +1389,7 @@
                 <a:ea typeface="Aptos Display"/>
                 <a:cs typeface="Aptos Display"/>
               </a:rPr>
-              <a:t>Longcycler-only is the clean primary denominator</a:t>
+              <a:t>Longcycler-only is now the sole analytical denominator</a:t>
             </a:r>
           </a:p>
         </p:txBody>
@@ -1477,7 +1489,7 @@
                 <a:ea typeface="Aptos"/>
                 <a:cs typeface="Aptos"/>
               </a:rPr>
-              <a:t>The analysis keeps one assembler for strain, lineage, and VF summaries; the 556-row mixed canonical set remains context.</a:t>
+              <a:t>Every genomic model, table and figure uses the selected QC-passing Longcycler cohort.</a:t>
             </a:r>
           </a:p>
         </p:txBody>
@@ -1577,7 +1589,7 @@
                 <a:ea typeface="Aptos"/>
                 <a:cs typeface="Aptos"/>
               </a:rPr>
-              <a:t>Longcycler-only methods summary  |  supervisor discussion  |  9 July 2026</a:t>
+              <a:t>Longcycler-only methods summary  |  RQ01–RQ10  |  15 July 2026</a:t>
             </a:r>
           </a:p>
         </p:txBody>
@@ -1842,7 +1854,7 @@
                 <a:ea typeface="Aptos"/>
                 <a:cs typeface="Aptos"/>
               </a:rPr>
-              <a:t>Single-assembler denominator reduces technical variation from assembly choice.</a:t>
+              <a:t>One selected QC-passing assembly per episode keeps strain, lineage and VF summaries on one reproducible input contract.</a:t>
             </a:r>
           </a:p>
         </p:txBody>
@@ -1942,7 +1954,7 @@
                 <a:ea typeface="Aptos"/>
                 <a:cs typeface="Aptos"/>
               </a:rPr>
-              <a:t>It avoids defending equivalence between assemblers for small distance thresholds.</a:t>
+              <a:t>Every downstream join is checked against the same 532 episode keys.</a:t>
             </a:r>
           </a:p>
         </p:txBody>
@@ -2142,7 +2154,7 @@
                 <a:ea typeface="Aptos"/>
                 <a:cs typeface="Aptos"/>
               </a:rPr>
-              <a:t>Primary genomic denominator becomes 532 Longcycler rows from 161 participants.</a:t>
+              <a:t>The analytical cohort is 532 genome-linked episodes from 161 residents.</a:t>
             </a:r>
           </a:p>
         </p:txBody>
@@ -2242,7 +2254,7 @@
                 <a:ea typeface="Aptos"/>
                 <a:cs typeface="Aptos"/>
               </a:rPr>
-              <a:t>The 24 Flye fallback rows are excluded rather than treated as interchangeable.</a:t>
+              <a:t>All 893 direct pairs and 371 adjacent transitions have Longcycler endpoints.</a:t>
             </a:r>
           </a:p>
         </p:txBody>
@@ -2442,7 +2454,7 @@
                 <a:ea typeface="Aptos"/>
                 <a:cs typeface="Aptos"/>
               </a:rPr>
-              <a:t>Clinical UTI labels are unchanged and applied independently of assembler choice.</a:t>
+              <a:t>Clinical labels are assigned independently using the versioned operational UTI phenotype.</a:t>
             </a:r>
           </a:p>
         </p:txBody>
@@ -2542,7 +2554,7 @@
                 <a:ea typeface="Aptos"/>
                 <a:cs typeface="Aptos"/>
               </a:rPr>
-              <a:t>ST remains lineage context; ≤25 SNPs remains the strict same-strain rule.</a:t>
+              <a:t>The ≤25 SNP boundary remains an operational support rule—not a causal result.</a:t>
             </a:r>
           </a:p>
         </p:txBody>
@@ -2607,7 +2619,7 @@
                 <a:ea typeface="Aptos"/>
                 <a:cs typeface="Aptos"/>
               </a:rPr>
-              <a:t>Discussion framing: conservative methods decision, not a claim that Flye assemblies are unusable.</a:t>
+              <a:t>Full clinical source counts appear only as labelled attrition/QC context.</a:t>
             </a:r>
           </a:p>
         </p:txBody>
@@ -2829,7 +2841,7 @@
                 <a:ea typeface="Aptos Display"/>
                 <a:cs typeface="Aptos Display"/>
               </a:rPr>
-              <a:t>The single-assembler analysis retains 532 genome-linked episodes</a:t>
+              <a:t>The analysis contains 532 selected genome-linked episodes</a:t>
             </a:r>
           </a:p>
         </p:txBody>
@@ -2929,7 +2941,7 @@
                 <a:ea typeface="Aptos"/>
                 <a:cs typeface="Aptos"/>
               </a:rPr>
-              <a:t>Counts are reported at the correct unit: clinical row, selected assembly, VF feature, or within-resident transition.</a:t>
+              <a:t>    Counts remain paired with their unit, filter and exact Longcycler-only denominator.</a:t>
             </a:r>
           </a:p>
         </p:txBody>
@@ -3129,7 +3141,7 @@
                 <a:ea typeface="Aptos"/>
                 <a:cs typeface="Aptos"/>
               </a:rPr>
-              <a:t>Longcycler-only methods summary  |  supervisor discussion  |  9 July 2026</a:t>
+              <a:t>Longcycler-only methods summary  |  RQ01–RQ10  |  15 July 2026</a:t>
             </a:r>
           </a:p>
         </p:txBody>
@@ -3259,7 +3271,7 @@
                 <a:ea typeface="Aptos"/>
                 <a:cs typeface="Aptos"/>
               </a:rPr>
-              <a:t>SELECTION RULE</a:t>
+              <a:t>SELECTED COHORT CONTRACT</a:t>
             </a:r>
           </a:p>
         </p:txBody>
@@ -3459,7 +3471,7 @@
                 <a:ea typeface="Aptos"/>
                 <a:cs typeface="Aptos"/>
               </a:rPr>
-              <a:t>Raw canonical set</a:t>
+              <a:t>Analytical episodes</a:t>
             </a:r>
           </a:p>
         </p:txBody>
@@ -3524,7 +3536,7 @@
                 <a:ea typeface="Aptos Display"/>
                 <a:cs typeface="Aptos Display"/>
               </a:rPr>
-              <a:t>556</a:t>
+              <a:t>532</a:t>
             </a:r>
           </a:p>
         </p:txBody>
@@ -3589,7 +3601,7 @@
                 <a:ea typeface="Aptos"/>
                 <a:cs typeface="Aptos"/>
               </a:rPr>
-              <a:t>Longcycler-preferred + Flye fallback</a:t>
+              <a:t>selected QC-passing Longcycler rows</a:t>
             </a:r>
           </a:p>
         </p:txBody>
@@ -3654,7 +3666,7 @@
                 <a:ea typeface="Aptos Mono"/>
                 <a:cs typeface="Aptos Mono"/>
               </a:rPr>
-              <a:t>current generated canonical analysis</a:t>
+              <a:t>analysis clinical cohort</a:t>
             </a:r>
           </a:p>
         </p:txBody>
@@ -3854,7 +3866,7 @@
                 <a:ea typeface="Aptos"/>
                 <a:cs typeface="Aptos"/>
               </a:rPr>
-              <a:t>Longcycler-only set</a:t>
+              <a:t>Residents</a:t>
             </a:r>
           </a:p>
         </p:txBody>
@@ -3919,7 +3931,7 @@
                 <a:ea typeface="Aptos Display"/>
                 <a:cs typeface="Aptos Display"/>
               </a:rPr>
-              <a:t>532</a:t>
+              <a:t>161</a:t>
             </a:r>
           </a:p>
         </p:txBody>
@@ -3984,7 +3996,7 @@
                 <a:ea typeface="Aptos"/>
                 <a:cs typeface="Aptos"/>
               </a:rPr>
-              <a:t>QC-passing selected Longcycler rows; 24 Flye fallback rows excluded</a:t>
+              <a:t>unique residents represented</a:t>
             </a:r>
           </a:p>
         </p:txBody>
@@ -4049,7 +4061,7 @@
                 <a:ea typeface="Aptos Mono"/>
                 <a:cs typeface="Aptos Mono"/>
               </a:rPr>
-              <a:t>canonical_assembly_selection.csv</a:t>
+              <a:t>selected assembly manifest</a:t>
             </a:r>
           </a:p>
         </p:txBody>
@@ -4114,7 +4126,7 @@
                 <a:ea typeface="Aptos"/>
                 <a:cs typeface="Aptos"/>
               </a:rPr>
-              <a:t>EPISODE AND LINEAGE DENOMINATOR</a:t>
+              <a:t>CLINICAL AND PAIR DENOMINATORS</a:t>
             </a:r>
           </a:p>
         </p:txBody>
@@ -4314,7 +4326,7 @@
                 <a:ea typeface="Aptos"/>
                 <a:cs typeface="Aptos"/>
               </a:rPr>
-              <a:t>Participants</a:t>
+              <a:t>Operational status</a:t>
             </a:r>
           </a:p>
         </p:txBody>
@@ -4379,7 +4391,7 @@
                 <a:ea typeface="Aptos Display"/>
                 <a:cs typeface="Aptos Display"/>
               </a:rPr>
-              <a:t>161</a:t>
+              <a:t>16 | 516</a:t>
             </a:r>
           </a:p>
         </p:txBody>
@@ -4444,7 +4456,7 @@
                 <a:ea typeface="Aptos"/>
                 <a:cs typeface="Aptos"/>
               </a:rPr>
-              <a:t>retained Longcycler-linked participants</a:t>
+              <a:t>UTI | Not_UTI on the selected cohort</a:t>
             </a:r>
           </a:p>
         </p:txBody>
@@ -4509,7 +4521,7 @@
                 <a:ea typeface="Aptos Mono"/>
                 <a:cs typeface="Aptos Mono"/>
               </a:rPr>
-              <a:t>vf_analysis_ready.csv</a:t>
+              <a:t>analysis clinical cohort</a:t>
             </a:r>
           </a:p>
         </p:txBody>
@@ -4709,7 +4721,7 @@
                 <a:ea typeface="Aptos"/>
                 <a:cs typeface="Aptos"/>
               </a:rPr>
-              <a:t>Clinical status</a:t>
+              <a:t>Direct genome pairs</a:t>
             </a:r>
           </a:p>
         </p:txBody>
@@ -4774,7 +4786,7 @@
                 <a:ea typeface="Aptos Display"/>
                 <a:cs typeface="Aptos Display"/>
               </a:rPr>
-              <a:t>16 | 516</a:t>
+              <a:t>893</a:t>
             </a:r>
           </a:p>
         </p:txBody>
@@ -4839,7 +4851,7 @@
                 <a:ea typeface="Aptos"/>
                 <a:cs typeface="Aptos"/>
               </a:rPr>
-              <a:t>UTI | Not_UTI using primary status</a:t>
+              <a:t>all unordered within-resident pairs</a:t>
             </a:r>
           </a:p>
         </p:txBody>
@@ -4904,7 +4916,7 @@
                 <a:ea typeface="Aptos Mono"/>
                 <a:cs typeface="Aptos Mono"/>
               </a:rPr>
-              <a:t>status joined to Longcycler rows</a:t>
+              <a:t>pairwise metrics</a:t>
             </a:r>
           </a:p>
         </p:txBody>
@@ -5204,7 +5216,7 @@
                 <a:ea typeface="Aptos"/>
                 <a:cs typeface="Aptos"/>
               </a:rPr>
-              <a:t>VF feature space</a:t>
+              <a:t>VFDB feature space</a:t>
             </a:r>
           </a:p>
         </p:txBody>
@@ -5334,7 +5346,7 @@
                 <a:ea typeface="Aptos"/>
                 <a:cs typeface="Aptos"/>
               </a:rPr>
-              <a:t>binary VF gene columns retained</a:t>
+              <a:t>binary features on selected episodes</a:t>
             </a:r>
           </a:p>
         </p:txBody>
@@ -5399,7 +5411,7 @@
                 <a:ea typeface="Aptos Mono"/>
                 <a:cs typeface="Aptos Mono"/>
               </a:rPr>
-              <a:t>vf_analysis_ready.csv</a:t>
+              <a:t>claim registry</a:t>
             </a:r>
           </a:p>
         </p:txBody>
@@ -5664,7 +5676,7 @@
                 <a:ea typeface="Aptos Display"/>
                 <a:cs typeface="Aptos Display"/>
               </a:rPr>
-              <a:t>514 | 80</a:t>
+              <a:t>493 | 76</a:t>
             </a:r>
           </a:p>
         </p:txBody>
@@ -5729,7 +5741,7 @@
                 <a:ea typeface="Aptos"/>
                 <a:cs typeface="Aptos"/>
               </a:rPr>
-              <a:t>typed rows | distinct STs; lineage context only</a:t>
+              <a:t>typed episodes | distinct ST labels</a:t>
             </a:r>
           </a:p>
         </p:txBody>
@@ -5794,7 +5806,7 @@
                 <a:ea typeface="Aptos Mono"/>
                 <a:cs typeface="Aptos Mono"/>
               </a:rPr>
-              <a:t>mlst_provider_preferred.csv</a:t>
+              <a:t>claim registry</a:t>
             </a:r>
           </a:p>
         </p:txBody>
@@ -5994,7 +6006,7 @@
                 <a:ea typeface="Aptos"/>
                 <a:cs typeface="Aptos"/>
               </a:rPr>
-              <a:t>Longitudinal pairs</a:t>
+              <a:t>Adjacent transitions</a:t>
             </a:r>
           </a:p>
         </p:txBody>
@@ -6059,7 +6071,7 @@
                 <a:ea typeface="Aptos Display"/>
                 <a:cs typeface="Aptos Display"/>
               </a:rPr>
-              <a:t>371</a:t>
+              <a:t>371 | 139</a:t>
             </a:r>
           </a:p>
         </p:txBody>
@@ -6124,31 +6136,7 @@
                 <a:ea typeface="Aptos"/>
                 <a:cs typeface="Aptos"/>
               </a:rPr>
-              <a:t>rebuilt in pipeline time order</a:t>
-            </a:r>
-          </a:p>
-          <a:p xmlns:a="http://schemas.openxmlformats.org/drawingml/2006/main">
-            <a:pPr algn="l">
-              <a:buNone/>
-              <a:defRPr sz="900" b="0">
-                <a:solidFill>
-                  <a:srgbClr val="607587"/>
-                </a:solidFill>
-                <a:latin typeface="Aptos"/>
-                <a:ea typeface="Aptos"/>
-                <a:cs typeface="Aptos"/>
-              </a:defRPr>
-            </a:pPr>
-            <a:r>
-              <a:rPr sz="900" b="0">
-                <a:solidFill>
-                  <a:srgbClr val="607587"/>
-                </a:solidFill>
-                <a:latin typeface="Aptos"/>
-                <a:ea typeface="Aptos"/>
-                <a:cs typeface="Aptos"/>
-              </a:rPr>
-              <a:t>from 139 participants</a:t>
+              <a:t>pairs | residents after full rebuild</a:t>
             </a:r>
           </a:p>
         </p:txBody>
@@ -6213,7 +6201,7 @@
                 <a:ea typeface="Aptos Mono"/>
                 <a:cs typeface="Aptos Mono"/>
               </a:rPr>
-              <a:t>vf_longitudinal_transitions.csv</a:t>
+              <a:t>longcycler transitions</a:t>
             </a:r>
           </a:p>
         </p:txBody>
@@ -6413,7 +6401,7 @@
                 <a:ea typeface="Aptos"/>
                 <a:cs typeface="Aptos"/>
               </a:rPr>
-              <a:t>Strict SNP evidence</a:t>
+              <a:t>Focused transitions</a:t>
             </a:r>
           </a:p>
         </p:txBody>
@@ -6478,7 +6466,7 @@
                 <a:ea typeface="Aptos Display"/>
                 <a:cs typeface="Aptos Display"/>
               </a:rPr>
-              <a:t>116</a:t>
+              <a:t>9 | 5</a:t>
             </a:r>
           </a:p>
         </p:txBody>
@@ -6543,31 +6531,7 @@
                 <a:ea typeface="Aptos"/>
                 <a:cs typeface="Aptos"/>
               </a:rPr>
-              <a:t>≤25 SNP among rebuilt pairs</a:t>
-            </a:r>
-          </a:p>
-          <a:p xmlns:a="http://schemas.openxmlformats.org/drawingml/2006/main">
-            <a:pPr algn="l">
-              <a:buNone/>
-              <a:defRPr sz="900" b="0">
-                <a:solidFill>
-                  <a:srgbClr val="607587"/>
-                </a:solidFill>
-                <a:latin typeface="Aptos"/>
-                <a:ea typeface="Aptos"/>
-                <a:cs typeface="Aptos"/>
-              </a:defRPr>
-            </a:pPr>
-            <a:r>
-              <a:rPr sz="900" b="0">
-                <a:solidFill>
-                  <a:srgbClr val="607587"/>
-                </a:solidFill>
-                <a:latin typeface="Aptos"/>
-                <a:ea typeface="Aptos"/>
-                <a:cs typeface="Aptos"/>
-              </a:rPr>
-              <a:t>7/9 Not_UTI -&gt; UTI strict</a:t>
+              <a:t>Not_UTI→UTI | at ≤25 SNPs</a:t>
             </a:r>
           </a:p>
         </p:txBody>
@@ -6632,7 +6596,7 @@
                 <a:ea typeface="Aptos Mono"/>
                 <a:cs typeface="Aptos Mono"/>
               </a:rPr>
-              <a:t>pairwise_metrics.csv</a:t>
+              <a:t>mechanism casebook</a:t>
             </a:r>
           </a:p>
         </p:txBody>
@@ -6854,7 +6818,7 @@
                 <a:ea typeface="Aptos Display"/>
                 <a:cs typeface="Aptos Display"/>
               </a:rPr>
-              <a:t>Longcycler-only supports reproducible methods</a:t>
+              <a:t>The release supports reproducible, cautious genomic description</a:t>
             </a:r>
           </a:p>
         </p:txBody>
@@ -6954,7 +6918,7 @@
                 <a:ea typeface="Aptos"/>
                 <a:cs typeface="Aptos"/>
               </a:rPr>
-              <a:t>Boundary: reproducibility choices are separate from biological interpretation.</a:t>
+              <a:t>Direct evidence, operational definitions and interpretation limits remain separate.</a:t>
             </a:r>
           </a:p>
         </p:txBody>
@@ -7054,7 +7018,7 @@
                 <a:ea typeface="Aptos"/>
                 <a:cs typeface="Aptos"/>
               </a:rPr>
-              <a:t>Longcycler-only methods summary  |  supervisor discussion  |  9 July 2026</a:t>
+              <a:t>Longcycler-only methods summary  |  RQ01–RQ10  |  15 July 2026</a:t>
             </a:r>
           </a:p>
         </p:txBody>
@@ -7319,7 +7283,7 @@
                 <a:ea typeface="Aptos"/>
                 <a:cs typeface="Aptos"/>
               </a:rPr>
-              <a:t>VF presence/absence, MLST lineage context, core SNP strain context, and longitudinal transitions.</a:t>
+              <a:t>VF presence/absence, MLST lineage context, direct pair evidence, longitudinal transitions and casebook traceability.</a:t>
             </a:r>
           </a:p>
         </p:txBody>
@@ -7419,7 +7383,7 @@
                 <a:ea typeface="Aptos"/>
                 <a:cs typeface="Aptos"/>
               </a:rPr>
-              <a:t>Strict persistence is reported with SNP evidence, not ST agreement alone.</a:t>
+              <a:t>Continuity is described from direct ≤25 SNP evidence—not ST agreement or graph transitivity alone.</a:t>
             </a:r>
           </a:p>
         </p:txBody>
@@ -7554,7 +7518,7 @@
                 <a:ea typeface="Aptos"/>
                 <a:cs typeface="Aptos"/>
               </a:rPr>
-              <a:t>NOT RECALCULATED</a:t>
+              <a:t>NOT SUPPORTED</a:t>
             </a:r>
           </a:p>
         </p:txBody>
@@ -7619,7 +7583,7 @@
                 <a:ea typeface="Aptos"/>
                 <a:cs typeface="Aptos"/>
               </a:rPr>
-              <a:t>No antibiotic, demographic, host-factor, or wgMLST allele claims are inferred from proxies.</a:t>
+              <a:t>No antibiotic, demographic, host-factor, named-mutation or causal mechanism claim is inferred from proxies.</a:t>
             </a:r>
           </a:p>
         </p:txBody>
@@ -7719,7 +7683,7 @@
                 <a:ea typeface="Aptos"/>
                 <a:cs typeface="Aptos"/>
               </a:rPr>
-              <a:t>The summary does not treat SNP and wgMLST distances as interchangeable.</a:t>
+              <a:t>The operational UTI phenotype is not presented as a reconstruction of the full published protocol.</a:t>
             </a:r>
           </a:p>
         </p:txBody>
@@ -7854,7 +7818,7 @@
                 <a:ea typeface="Aptos"/>
                 <a:cs typeface="Aptos"/>
               </a:rPr>
-              <a:t>SUPERVISOR ASK</a:t>
+              <a:t>RELEASE CONTRACT</a:t>
             </a:r>
           </a:p>
         </p:txBody>
@@ -7919,7 +7883,7 @@
                 <a:ea typeface="Aptos"/>
                 <a:cs typeface="Aptos"/>
               </a:rPr>
-              <a:t>Use Longcycler-only as the primary defensible methods denominator.</a:t>
+              <a:t>RQ01–RQ10 use the same 532-episode analytical cohort.</a:t>
             </a:r>
           </a:p>
         </p:txBody>
@@ -8019,7 +7983,7 @@
                 <a:ea typeface="Aptos"/>
                 <a:cs typeface="Aptos"/>
               </a:rPr>
-              <a:t>Keep the 556-row mixed canonical analysis only as context or sensitivity, if needed.</a:t>
+              <a:t>9/9 casebook rows are linked; 0 are missing. 17 near-miss rows remain separate.</a:t>
             </a:r>
           </a:p>
         </p:txBody>
@@ -8084,7 +8048,7 @@
                 <a:ea typeface="Aptos"/>
                 <a:cs typeface="Aptos"/>
               </a:rPr>
-              <a:t>Suggested wording: primary genomic analyses were restricted to QC-passing Longcycler assemblies to minimise assembler-induced technical heterogeneity.</a:t>
+              <a:t>Suggested wording: genomic analyses were restricted to selected QC-passing Longcycler assemblies, with exploratory non-causal interpretation.</a:t>
             </a:r>
           </a:p>
         </p:txBody>
